--- a/RA4 - Seguretat en xarxa/AA3 - Signatura digital/RA4_AA3_Signatura_digital.pptx
+++ b/RA4 - Seguretat en xarxa/AA3 - Signatura digital/RA4_AA3_Signatura_digital.pptx
@@ -2051,6 +2051,10 @@
           </a:solidFill>
           <a:ln/>
         </p:spPr>
+        <p:txBody>
+          <a:bodyPr/>
+          <a:p/>
+        </p:txBody>
       </p:sp>
       <p:sp>
         <p:nvSpPr>
@@ -2071,6 +2075,10 @@
           </a:solidFill>
           <a:ln/>
         </p:spPr>
+        <p:txBody>
+          <a:bodyPr/>
+          <a:p/>
+        </p:txBody>
       </p:sp>
       <p:sp>
         <p:nvSpPr>
@@ -2530,6 +2538,10 @@
           </a:solidFill>
           <a:ln/>
         </p:spPr>
+        <p:txBody>
+          <a:bodyPr/>
+          <a:p/>
+        </p:txBody>
       </p:sp>
       <p:pic>
         <p:nvPicPr>
@@ -3510,6 +3522,10 @@
             </a:outerShdw>
           </a:effectLst>
         </p:spPr>
+        <p:txBody>
+          <a:bodyPr/>
+          <a:p/>
+        </p:txBody>
       </p:sp>
       <p:sp>
         <p:nvSpPr>
@@ -3530,6 +3546,10 @@
           </a:solidFill>
           <a:ln/>
         </p:spPr>
+        <p:txBody>
+          <a:bodyPr/>
+          <a:p/>
+        </p:txBody>
       </p:sp>
       <p:pic>
         <p:nvPicPr>
@@ -3669,6 +3689,10 @@
             </a:outerShdw>
           </a:effectLst>
         </p:spPr>
+        <p:txBody>
+          <a:bodyPr/>
+          <a:p/>
+        </p:txBody>
       </p:sp>
       <p:sp>
         <p:nvSpPr>
@@ -3689,6 +3713,10 @@
           </a:solidFill>
           <a:ln/>
         </p:spPr>
+        <p:txBody>
+          <a:bodyPr/>
+          <a:p/>
+        </p:txBody>
       </p:sp>
       <p:pic>
         <p:nvPicPr>
@@ -3828,6 +3856,10 @@
             </a:outerShdw>
           </a:effectLst>
         </p:spPr>
+        <p:txBody>
+          <a:bodyPr/>
+          <a:p/>
+        </p:txBody>
       </p:sp>
       <p:sp>
         <p:nvSpPr>
@@ -3848,6 +3880,10 @@
           </a:solidFill>
           <a:ln/>
         </p:spPr>
+        <p:txBody>
+          <a:bodyPr/>
+          <a:p/>
+        </p:txBody>
       </p:sp>
       <p:pic>
         <p:nvPicPr>
@@ -4771,7 +4807,7 @@
                 <a:ea typeface="Calibri" pitchFamily="34" charset="-122"/>
                 <a:cs typeface="Calibri" pitchFamily="34" charset="-120"/>
               </a:rPr>
-              <a:t>Llicència Creative Commons BY-NC-SA · Institut Obert de Catalunya, 2011 (materials adaptats i ampliats)</a:t>
+              <a:t>Llicència CC BY-SA 4.0 · Adaptat de "Materials" (SMX-0226SI), Carlos Alonso Martínez, Escola Pia de Mataró</a:t>
             </a:r>
             <a:endParaRPr lang="en-US" sz="1050" dirty="0"/>
           </a:p>
@@ -4998,6 +5034,10 @@
             </a:outerShdw>
           </a:effectLst>
         </p:spPr>
+        <p:txBody>
+          <a:bodyPr/>
+          <a:p/>
+        </p:txBody>
       </p:sp>
       <p:sp>
         <p:nvSpPr>
@@ -5018,6 +5058,10 @@
           </a:solidFill>
           <a:ln/>
         </p:spPr>
+        <p:txBody>
+          <a:bodyPr/>
+          <a:p/>
+        </p:txBody>
       </p:sp>
       <p:pic>
         <p:nvPicPr>
@@ -5157,6 +5201,10 @@
             </a:outerShdw>
           </a:effectLst>
         </p:spPr>
+        <p:txBody>
+          <a:bodyPr/>
+          <a:p/>
+        </p:txBody>
       </p:sp>
       <p:sp>
         <p:nvSpPr>
@@ -5177,6 +5225,10 @@
           </a:solidFill>
           <a:ln/>
         </p:spPr>
+        <p:txBody>
+          <a:bodyPr/>
+          <a:p/>
+        </p:txBody>
       </p:sp>
       <p:pic>
         <p:nvPicPr>
@@ -5316,6 +5368,10 @@
             </a:outerShdw>
           </a:effectLst>
         </p:spPr>
+        <p:txBody>
+          <a:bodyPr/>
+          <a:p/>
+        </p:txBody>
       </p:sp>
       <p:sp>
         <p:nvSpPr>
@@ -5336,6 +5392,10 @@
           </a:solidFill>
           <a:ln/>
         </p:spPr>
+        <p:txBody>
+          <a:bodyPr/>
+          <a:p/>
+        </p:txBody>
       </p:sp>
       <p:pic>
         <p:nvPicPr>
@@ -6253,6 +6313,10 @@
           </a:solidFill>
           <a:ln/>
         </p:spPr>
+        <p:txBody>
+          <a:bodyPr/>
+          <a:p/>
+        </p:txBody>
       </p:sp>
       <p:pic>
         <p:nvPicPr>
@@ -6779,6 +6843,10 @@
           </a:solidFill>
           <a:ln/>
         </p:spPr>
+        <p:txBody>
+          <a:bodyPr/>
+          <a:p/>
+        </p:txBody>
       </p:sp>
       <p:pic>
         <p:nvPicPr>
@@ -7016,6 +7084,10 @@
           </a:solidFill>
           <a:ln/>
         </p:spPr>
+        <p:txBody>
+          <a:bodyPr/>
+          <a:p/>
+        </p:txBody>
       </p:sp>
       <p:pic>
         <p:nvPicPr>
@@ -8262,6 +8334,10 @@
           </a:solidFill>
           <a:ln/>
         </p:spPr>
+        <p:txBody>
+          <a:bodyPr/>
+          <a:p/>
+        </p:txBody>
       </p:sp>
       <p:pic>
         <p:nvPicPr>

--- a/RA4 - Seguretat en xarxa/AA3 - Signatura digital/RA4_AA3_Signatura_digital.pptx
+++ b/RA4 - Seguretat en xarxa/AA3 - Signatura digital/RA4_AA3_Signatura_digital.pptx
@@ -2603,7 +2603,7 @@
                 <a:ea typeface="Calibri" pitchFamily="34" charset="-122"/>
                 <a:cs typeface="Calibri" pitchFamily="34" charset="-120"/>
               </a:rPr>
-              <a:t>"openssl req -x509 -newkey rsa:3072 -keyout priv.pem -out cert.pem -days 365 -nodes -subj '/C=ES/O=EverPia SL/CN=intranet.everpia.local'" genera la clau i el certificat en un sol pas. "openssl x509 -in cert.pem -noout -subject -issuer -dates -fingerprint -sha256" en mostra les dades clau: en un certificat autosignat, el subject i l'issuer coincideixen. Ho practicareu a l'exercici guiat.</a:t>
+              <a:t>"openssl req -x509 -newkey rsa:3072 -keyout priv.pem -out cert.pem -days 365 -nodes -subj '/C=ES/O=Puig Castellar Tech SL/CN=intranet.puigcastellartech.local'" genera la clau i el certificat en un sol pas. "openssl x509 -in cert.pem -noout -subject -issuer -dates -fingerprint -sha256" en mostra les dades clau: en un certificat autosignat, el subject i l'issuer coincideixen. Ho practicareu a l'exercici guiat.</a:t>
             </a:r>
             <a:endParaRPr lang="en-US" sz="1350" dirty="0"/>
           </a:p>
